--- a/ML_WAF.pptx
+++ b/ML_WAF.pptx
@@ -113,6 +113,11 @@
       </a:defRPr>
     </a:lvl9pPr>
   </p:defaultTextStyle>
+  <p:extLst>
+    <p:ext uri="{EFAFB233-063F-42B5-8137-9DF3F51BA10A}">
+      <p15:sldGuideLst xmlns:p15="http://schemas.microsoft.com/office/powerpoint/2012/main"/>
+    </p:ext>
+  </p:extLst>
 </p:presentation>
 </file>
 
@@ -8024,7 +8029,7 @@
         <p:spPr>
           <a:xfrm>
             <a:off x="1198225" y="2295664"/>
-            <a:ext cx="9916816" cy="1655762"/>
+            <a:ext cx="10221836" cy="1655762"/>
           </a:xfrm>
         </p:spPr>
         <p:txBody>
@@ -8041,7 +8046,7 @@
                 <a:latin typeface="Arial" panose="020B0604020202020204" pitchFamily="34" charset="0"/>
                 <a:cs typeface="Arial" panose="020B0604020202020204" pitchFamily="34" charset="0"/>
               </a:rPr>
-              <a:t>Behavioral Network Traffic Detection using Machine Learning</a:t>
+              <a:t>ML-Based Anomaly Detection and Decision Module for Web 						Application Firewall Integration</a:t>
             </a:r>
           </a:p>
         </p:txBody>
